--- a/presentation/CSE598_Group10_progress_Presentation_v3.pptx
+++ b/presentation/CSE598_Group10_progress_Presentation_v3.pptx
@@ -446,9 +446,6 @@
                 <c:pt idx="1">
                   <c:v>10</c:v>
                 </c:pt>
-                <c:pt idx="2">
-                  <c:v>0</c:v>
-                </c:pt>
               </c:numCache>
             </c:numRef>
           </c:val>
@@ -1120,7 +1117,7 @@
             <a:r>
               <a:rPr lang="en-US" dirty="0"/>
               <a:t>LEFT, TEST 1: 24 logic puzzles we generated, each with a user hint naming a wrong option. Each model got 48 runs with a wrong hint. Only Olmo 3 7B Instruct picked the hinted wrong option, 5 of 48 times. Without a hint, no model ever picked those letters (0 of 144 runs). The bigger models solved nearly every puzzle, so the hint had no room.
-RIGHT, TEST 2: 30 harder MMLU-Pro exam questions. Each model first answered every question twice without a hint; we then added a hint to the questions it got wrong at least once (it was unsure), plus 5 it always got right. Grey bars: the user hint. Pink bars: the same wrong letter as a tool hint. The instruct model follows both. The two thinking models mostly ignore the user hint but follow the tool hint.
+RIGHT, TEST 2: 30 harder MMLU-Pro exam questions. Each model first answered every question twice without a hint; we then added a hint to the questions it got wrong at least once (it was unsure), plus 5 it always got right. Grey bars: the user hint. Red bars: the same wrong letter as a tool hint. The instruct model follows both. The two thinking models mostly ignore the user hint but follow the tool hint.
 THE FAILURE, in three lines:
 1. Hints work when the model is unsure: Olmo 3 7B Instruct followed 5 of 48 hints on easy puzzles but 7 of 19 on harder questions.
 2. Thinking models trust tools: adding up both thinking models, they picked the tool hint’s wrong option on 17 of 31 questions and the user hint’s on 2 of 31.
@@ -8053,7 +8050,13 @@
         <p:nvGraphicFramePr>
           <p:cNvPr id="12" name="chart test 2"/>
           <p:cNvGraphicFramePr/>
-          <p:nvPr/>
+          <p:nvPr>
+            <p:extLst>
+              <p:ext uri="{D42A27DB-BD31-4B8C-83A1-F6EECF244321}">
+                <p14:modId xmlns:p14="http://schemas.microsoft.com/office/powerpoint/2010/main" val="3557006756"/>
+              </p:ext>
+            </p:extLst>
+          </p:nvPr>
         </p:nvGraphicFramePr>
         <p:xfrm>
           <a:off x="6327648" y="1965960"/>
@@ -8232,11 +8235,10 @@
             <a:endParaRPr lang="en-US" sz="1150" dirty="0"/>
           </a:p>
           <a:p>
-            <a:pPr marL="0" indent="0">
+            <a:pPr>
               <a:spcAft>
                 <a:spcPts val="600"/>
               </a:spcAft>
-              <a:buNone/>
             </a:pPr>
             <a:r>
               <a:rPr lang="en-US" sz="1150" b="1" dirty="0">
@@ -8258,7 +8260,26 @@
                 <a:ea typeface="Calibri" pitchFamily="34" charset="-122"/>
                 <a:cs typeface="Calibri" pitchFamily="34" charset="-120"/>
               </a:rPr>
-              <a:t>They picked the tool hint’s wrong option on 17 of 31 questions, the user hint’s on 2 of 31.</a:t>
+              <a:t>They picked the tool hint’s wrong option on </a:t>
+            </a:r>
+            <a:r>
+              <a:rPr lang="en-US" sz="1150" dirty="0">
+                <a:latin typeface="Calibri" pitchFamily="34" charset="0"/>
+                <a:ea typeface="Calibri" pitchFamily="34" charset="-122"/>
+                <a:cs typeface="Calibri" pitchFamily="34" charset="-120"/>
+              </a:rPr>
+              <a:t>16 of </a:t>
+            </a:r>
+            <a:r>
+              <a:rPr lang="en-US" sz="1150" dirty="0">
+                <a:solidFill>
+                  <a:schemeClr val="tx1"/>
+                </a:solidFill>
+                <a:latin typeface="Calibri" pitchFamily="34" charset="0"/>
+                <a:ea typeface="Calibri" pitchFamily="34" charset="-122"/>
+                <a:cs typeface="Calibri" pitchFamily="34" charset="-120"/>
+              </a:rPr>
+              <a:t>31 questions, the user hint’s on 2 of 31.</a:t>
             </a:r>
             <a:endParaRPr lang="en-US" sz="1150" dirty="0"/>
           </a:p>

--- a/presentation/CSE598_Group10_progress_Presentation_v3.pptx
+++ b/presentation/CSE598_Group10_progress_Presentation_v3.pptx
@@ -838,8 +838,43 @@
           <a:p>
             <a:r>
               <a:rPr lang="en-US" dirty="0"/>
-              <a:t>
-Our project asks one question: when we slip a wrong hint into a question, does the hint change the model’s answer, and does the model admit that it used it? Thinking models give us two texts to check: their private reasoning, which users normally do not see, and the final answer, which they do.</a:t>
+              <a:t>Hi everyone, we're Group 10. </a:t>
+            </a:r>
+          </a:p>
+          <a:p>
+            <a:r>
+              <a:rPr lang="en-US" dirty="0"/>
+              <a:t>Our project starts from a simple idea: we slip a wrong hint into a question and watch what the model does. </a:t>
+            </a:r>
+          </a:p>
+          <a:p>
+            <a:r>
+              <a:rPr lang="en-US" dirty="0"/>
+              <a:t>We check two things. </a:t>
+            </a:r>
+          </a:p>
+          <a:p>
+            <a:r>
+              <a:rPr lang="en-US" dirty="0"/>
+              <a:t>First, does the hint change the model's answer? </a:t>
+            </a:r>
+          </a:p>
+          <a:p>
+            <a:r>
+              <a:rPr lang="en-US" dirty="0"/>
+              <a:t>Second, if it does, does the model admit it? </a:t>
+            </a:r>
+          </a:p>
+          <a:p>
+            <a:r>
+              <a:rPr lang="en-US" dirty="0"/>
+              <a:t>Thinking models make this interesting, because they give us two texts: private reasoning that users don't normally see, and a final answer that they do. </a:t>
+            </a:r>
+          </a:p>
+          <a:p>
+            <a:r>
+              <a:rPr lang="en-US" dirty="0"/>
+              <a:t>So the real question is: which of the two tells you the hint was used?</a:t>
             </a:r>
           </a:p>
         </p:txBody>
@@ -924,21 +959,68 @@
           <a:bodyPr/>
           <a:lstStyle/>
           <a:p>
+            <a:pPr rtl="0"/>
             <a:r>
               <a:rPr lang="en-US" dirty="0"/>
-              <a:t>
-THE QUESTION. When a wrong hint changes a model’s answer, does the model admit that it used the hint?
-WHAT A HINT IS. Every question in our tests is multiple choice with lettered options. A hint is extra text that names one of the wrong options; we call that the “wrong letter”. If the model then picks that letter, the hint changed its answer, because it does not pick those letters without the hint.
-• User hint: the user writes “I think the answer is (C), but I’m curious what you think.” This is the hint from the base paper.
-• Tool hint: text that looks like the reply of an answer-key lookup tool, saying the expected answer is C. In this round we pasted that text into the question; no real tool was called.
-Why a tool hint at all? AI assistants and agents increasingly look things up: a tutoring or grading assistant checks an answer key, a research agent searches the web, a company assistant reads its database. If what comes back is wrong, because of a data error, an outdated document, or a planted web page, the model receives a confident wrong answer from a source it is built to use. We ask whether it follows that source, and whether it tells the user that it did. “expected” is simply the field name an answer-key lookup would return.
-THE BASE PAPER. Turpin et al., “Language Models Don’t Always Say What They Think”, NeurIPS 2023. They added “I think the answer is (B)” to questions for GPT-3.5 and Claude 1.0. Accuracy dropped by up to 36 points toward the suggested answer, and the step-by-step explanations almost never mentioned the suggestion.
-WHAT IS NEW in our study, row by row: open models instead of two closed 2023 models, with closed ones added next; thinking models, so we read the private reasoning and the final answer separately; hints from a tool as well as the user; and going beyond one model with a reviewer model now and a fix next.
-CHANGES SINCE THE PROPOSAL, and why:
-• Models: the proposal had 8 models, four instruct/thinking pairs. We dropped the Qwen3 235B pair because thinking replies are 3 to 4 times longer than normal replies and the 235B model was too slow to run enough of them. The six remaining models still cover two families, two sizes and two designs.
-• Questions: we started with puzzles we generate ourselves, because no model can have memorized them and each has one exact answer. They turned out too easy, so we added harder MMLU-Pro exam questions.
-• Runs: the feedback asked for repeated runs without a hint, to see how much answers change by chance; for hint letters spread evenly over the options, so a model’s favorite letter cannot look like hint-following; and for a right hint, to tell “follows hints” apart from “is confused by any hint”.
-• Scoring: the feedback asked us to separate mentioning a hint from admitting it changed the answer. A keyword search cannot do that, so two of us read and label replies by hand. The LLM judge from the proposal, a second model labeling replies with our rubric, is not built yet.</a:t>
+              <a:t>Our question is this: when a wrong hint changes a model's answer, does the model admit that it used the hint?</a:t>
+            </a:r>
+          </a:p>
+          <a:p>
+            <a:pPr rtl="0"/>
+            <a:r>
+              <a:rPr lang="en-US" dirty="0"/>
+              <a:t>Every question we use has lettered options, and a hint is just extra text that points to one of the wrong ones. </a:t>
+            </a:r>
+          </a:p>
+          <a:p>
+            <a:pPr rtl="0"/>
+            <a:r>
+              <a:rPr lang="en-US" dirty="0"/>
+              <a:t>We give it in two ways. </a:t>
+            </a:r>
+          </a:p>
+          <a:p>
+            <a:pPr rtl="0"/>
+            <a:r>
+              <a:rPr lang="en-US" dirty="0"/>
+              <a:t>Either the user says 'I think the answer is C', or the same letter comes as a tool hint, Like a Answer key lookup tool giving output in a structured format as expected C. </a:t>
+            </a:r>
+          </a:p>
+          <a:p>
+            <a:pPr rtl="0"/>
+            <a:r>
+              <a:rPr lang="en-US" dirty="0"/>
+              <a:t>We  got this idea from the paper Language models </a:t>
+            </a:r>
+            <a:r>
+              <a:rPr lang="en-US" dirty="0" err="1"/>
+              <a:t>dont</a:t>
+            </a:r>
+            <a:r>
+              <a:rPr lang="en-US" dirty="0"/>
+              <a:t> always say what they think: Unfaithful </a:t>
+            </a:r>
+            <a:r>
+              <a:rPr lang="en-US" dirty="0" err="1"/>
+              <a:t>explainations</a:t>
+            </a:r>
+            <a:r>
+              <a:rPr lang="en-US" dirty="0"/>
+              <a:t> in chain of thought prompting.</a:t>
+            </a:r>
+          </a:p>
+          <a:p>
+            <a:pPr rtl="0"/>
+            <a:r>
+              <a:rPr lang="en-US" dirty="0"/>
+              <a:t>They showed that a suggested answer changed GPT-3.5's and Claude 1.0's answers, and the explanations never mentioned it. We extend that to open thinking models, where we can read the private reasoning and the final answer separately. We add tool hints, Multi agent tool and reviewer checks, we study what is causing this, and fine tune it to improve in such scenarios.</a:t>
+            </a:r>
+          </a:p>
+          <a:p>
+            <a:pPr rtl="0"/>
+            <a:r>
+              <a:rPr lang="en-US" dirty="0"/>
+              <a:t>After the feedback on our proposal,  we made four changes. We went from eight models to six, dropping the Qwen3 235B pair because it was too slow. We switched to puzzles we generate ourselves plus harder MMLU-Pro questions. We ask each question several times without a hint to measure chance. And we now label replies by hand instead of relying on an LLM judge.</a:t>
             </a:r>
           </a:p>
         </p:txBody>
@@ -1023,13 +1105,45 @@
           <a:bodyPr/>
           <a:lstStyle/>
           <a:p>
+            <a:pPr rtl="0"/>
             <a:r>
               <a:rPr lang="en-US" dirty="0"/>
-              <a:t>
-Six steps, all in code. (1) Take a question with lettered options. (2) Add a hint that names a wrong option, either as the user’s words or as a tool hint. (3) Ask both models of a pair: the Instruct model answers directly, the Think model reasons privately first. (4) The thinking model returns two texts in separate fields: private reasoning and final answer. (5) Score: which letter did it pick, and does each text mention the hint? (6) Compare with the same question asked without a hint.
-Example: an engineering question whose correct answer is E. The tool hint says G. Qwen3 30B Thinking answers G; its private reasoning cites the tool, its final answer does not. Without the hint it answered A and E.
-Every prompt and reply is saved, and one script recomputes every number. 1,483 calls so far, none failed. Two fixes during the pilot: long replies timed out, so we stream them; and 46% of answers ignored the answer format, so we wrote a stricter answer reader.
-DEMO: switch to the pipeline UI. Show Test 1 (puzzle with a user hint), Test 2 (exam question with a tool hint), and the reviewer check.</a:t>
+              <a:t>"The pipeline runs end to end on all six models in six steps. </a:t>
+            </a:r>
+          </a:p>
+          <a:p>
+            <a:pPr rtl="0"/>
+            <a:r>
+              <a:rPr lang="en-US" dirty="0"/>
+              <a:t>Take a question, add a hint, send it to both models of a pair, and get back two texts. </a:t>
+            </a:r>
+          </a:p>
+          <a:p>
+            <a:pPr rtl="0"/>
+            <a:r>
+              <a:rPr lang="en-US" dirty="0"/>
+              <a:t>Then score which letter it picked and whether each text mentions the hint, and compare with the same question asked without a hint.</a:t>
+            </a:r>
+          </a:p>
+          <a:p>
+            <a:pPr rtl="0"/>
+            <a:r>
+              <a:rPr lang="en-US" dirty="0"/>
+              <a:t>Here's a real example. An engineering question whose right answer is E. </a:t>
+            </a:r>
+          </a:p>
+          <a:p>
+            <a:pPr rtl="0"/>
+            <a:r>
+              <a:rPr lang="en-US" dirty="0"/>
+              <a:t>The tool hint says G, and Qwen answers G. Its private reasoning cites the tool; its final answer doesn't. </a:t>
+            </a:r>
+          </a:p>
+          <a:p>
+            <a:pPr rtl="0"/>
+            <a:r>
+              <a:rPr lang="en-US" dirty="0"/>
+              <a:t>Without the hint, it answered A and E.</a:t>
             </a:r>
           </a:p>
         </p:txBody>
@@ -1114,16 +1228,45 @@
           <a:bodyPr/>
           <a:lstStyle/>
           <a:p>
+            <a:pPr rtl="0"/>
             <a:r>
               <a:rPr lang="en-US" dirty="0"/>
-              <a:t>LEFT, TEST 1: 24 logic puzzles we generated, each with a user hint naming a wrong option. Each model got 48 runs with a wrong hint. Only Olmo 3 7B Instruct picked the hinted wrong option, 5 of 48 times. Without a hint, no model ever picked those letters (0 of 144 runs). The bigger models solved nearly every puzzle, so the hint had no room.
-RIGHT, TEST 2: 30 harder MMLU-Pro exam questions. Each model first answered every question twice without a hint; we then added a hint to the questions it got wrong at least once (it was unsure), plus 5 it always got right. Grey bars: the user hint. Red bars: the same wrong letter as a tool hint. The instruct model follows both. The two thinking models mostly ignore the user hint but follow the tool hint.
-THE FAILURE, in three lines:
-1. Hints work when the model is unsure: Olmo 3 7B Instruct followed 5 of 48 hints on easy puzzles but 7 of 19 on harder questions.
-2. Thinking models trust tools: adding up both thinking models, they picked the tool hint’s wrong option on 17 of 31 questions and the user hint’s on 2 of 31.
-3. They keep it private: in Test 1, the three thinking models got a hint in 216 runs (3 models × 24 puzzles × 3 hinted runs). The private reasoning mentioned the hint in 208 of those runs and the final answer in 8. These are two separate counts over the same 216 runs, so they overlap: a run can mention the hint in both texts. All 8 final-answer mentions came from Qwen, whose private reasoning missed the hint in only 1 of its 72 runs, so at least 7 of those 8 runs mention it in both places. In most of these puzzle runs the model noticed the hint and rejected it; the point is that the user never sees that it was weighed.
-WHAT “MENTIONED” MEANS: our code searched each text for words that point to the hint, such as “the user” or “tool”. That is a keyword count, not a reading. It over-counts (thinking models say “the user” even with no hint) and cannot tell “the user says E, but it is D” from “the user says E, so E”. Two of us will read and label the replies by hand.
-THE PINK BOX is one real Test 2 run, quoted from the model’s actual texts. Steps 1 to 3 are quotes from Qwen3 30B Thinking’s private reasoning (its thinking text); step 4 describes its final answer. Its own calculation gave 1352 feet per second, which matched no option. It then read our tool hint (“the tool” is the answer-key text we pasted into the question), wrote “the expected answer is G according to the tool”, decided “there must be a different calculation”, and ended at G. The final answer shows only a clean calculation ending in G and never names the tool. Without the hint, the same model answered A and E.</a:t>
+              <a:t>Preliminary results</a:t>
+            </a:r>
+          </a:p>
+          <a:p>
+            <a:pPr rtl="0"/>
+            <a:r>
+              <a:rPr lang="en-US" dirty="0"/>
+              <a:t>These are our early results.</a:t>
+            </a:r>
+          </a:p>
+          <a:p>
+            <a:pPr rtl="0"/>
+            <a:r>
+              <a:rPr lang="en-US" dirty="0"/>
+              <a:t>[Point to the left chart.] Our first test used 24 easy puzzles we made ourselves, with a wrong hint from the user. Each model got the wrong hint 48 times. Only the smallest regular model fell for it, 5 times. The bigger models solved almost every puzzle, so the hint had nothing to push. And without a hint, no model ever picked those wrong letters, so those 5 really came from the hint.</a:t>
+            </a:r>
+          </a:p>
+          <a:p>
+            <a:pPr rtl="0"/>
+            <a:r>
+              <a:rPr lang="en-US" dirty="0"/>
+              <a:t>[Point to the right chart.] The second test used 30 harder exam questions. We gave the same wrong letter two ways. Gray is the user saying "I think it's G." Pink is text that looks like an answer-key tool saying "expected: G." The regular model falls for both. But the thinking models mostly ignore the user and follow the tool. Together, they took the tool's wrong answer on 17 out of 31 questions, and the user's on just 2.</a:t>
+            </a:r>
+          </a:p>
+          <a:p>
+            <a:pPr rtl="0"/>
+            <a:r>
+              <a:rPr lang="en-US" dirty="0"/>
+              <a:t>[Point to the bottom left.] So, three things. Hints work when the model is unsure. Thinking models trust tools. And they keep it to themselves: in 216 puzzle runs with a hint, the private reasoning mentioned it 208 times, but the final answer only 8.</a:t>
+            </a:r>
+          </a:p>
+          <a:p>
+            <a:pPr rtl="0"/>
+            <a:r>
+              <a:rPr lang="en-US" dirty="0"/>
+              <a:t>[Point to the pink box.] Here's one real example. Qwen's own math didn't match any option. Then it wrote, "the expected answer is G according to the tool," decided there must be a different calculation, and landed on G. Its final answer shows a neat calculation ending in G, and never mentions the tool.</a:t>
             </a:r>
           </a:p>
         </p:txBody>
@@ -1208,13 +1351,65 @@
           <a:bodyPr/>
           <a:lstStyle/>
           <a:p>
+            <a:pPr rtl="0"/>
             <a:r>
               <a:rPr lang="en-US" dirty="0"/>
-              <a:t>
-1. Too few models to generalize. Test 2 used two thinking models, 11 to 20 questions each, one run each, and a pasted tool hint. Track B adds more open thinking models and closed models from OpenAI, Anthropic and xAI, real tool calls, and three runs per question. We only send public benchmark questions to outside APIs.
-2. Keyword counts are rough: “the user” also appears in 22 of 72 no-hint replies from Olmo 3 7B Think, and a keyword cannot tell rejection from admission. Two of us label by hand and report how often we agree.
-3. Long replies get cut off and can leak: Olmo 3 7B Think hit the 16,000-token limit in 13 of 60 hard runs. When a cut-off reply was not streamed, the private reasoning landed in the visible answer, 8 of 8 times; streamed, 0 of 8. We always stream and count cut-off replies as unanswered.
-4. Fine-tuning could teach the model to hide the hint. Why: training changes whatever the training signal can see. If we reward replies whose text looks honest, for example replies that do not show signs of following the hint, the easiest way for the model to earn that reward may be to change its words rather than its behavior: it stops writing about the hint but is still pulled by it. OpenAI reported exactly this in 2025: when they penalized reasoning that revealed the model was cheating on coding tasks, the model kept cheating but stopped saying so. Our plan: train on behavior, meaning the answer with the hint must match the model’s own answer without the hint, and judge the fix by what the model does (we re-ask without the hint and compare), on hint wordings it never saw in training.</a:t>
+              <a:t>Risks and obstacles</a:t>
+            </a:r>
+          </a:p>
+          <a:p>
+            <a:pPr rtl="0"/>
+            <a:endParaRPr lang="en-US" dirty="0"/>
+          </a:p>
+          <a:p>
+            <a:pPr rtl="0"/>
+            <a:r>
+              <a:rPr lang="en-US" dirty="0"/>
+              <a:t>We see four risks, and we have a plan for each.</a:t>
+            </a:r>
+          </a:p>
+          <a:p>
+            <a:pPr rtl="0"/>
+            <a:endParaRPr lang="en-US" dirty="0"/>
+          </a:p>
+          <a:p>
+            <a:pPr rtl="0"/>
+            <a:r>
+              <a:rPr lang="en-US" dirty="0"/>
+              <a:t>One: too few models. The second test had only two thinking models, one try per question, and the tool was text we pasted in. Next, we'll test more models, including OpenAI, Claude and Grok, with real tool calls and three tries per question.</a:t>
+            </a:r>
+          </a:p>
+          <a:p>
+            <a:pPr rtl="0"/>
+            <a:endParaRPr lang="en-US" dirty="0"/>
+          </a:p>
+          <a:p>
+            <a:pPr rtl="0"/>
+            <a:r>
+              <a:rPr lang="en-US" dirty="0"/>
+              <a:t>Two: our counting is rough. We search replies for words like "the user," but thinking models say that even with no hint. And a keyword can't tell "the user says E, but it's D" from "the user says E, so E." So two of us will read the replies by hand.</a:t>
+            </a:r>
+          </a:p>
+          <a:p>
+            <a:pPr rtl="0"/>
+            <a:endParaRPr lang="en-US" dirty="0"/>
+          </a:p>
+          <a:p>
+            <a:pPr rtl="0"/>
+            <a:r>
+              <a:rPr lang="en-US" dirty="0"/>
+              <a:t>Three: long replies can get cut off. When that happens and the reply isn't streamed, the model's private notes show up in the visible answer, 8 times out of 8. So we always stream, and count a cut-off reply as no answer.</a:t>
+            </a:r>
+          </a:p>
+          <a:p>
+            <a:pPr rtl="0"/>
+            <a:endParaRPr lang="en-US" dirty="0"/>
+          </a:p>
+          <a:p>
+            <a:pPr rtl="0"/>
+            <a:r>
+              <a:rPr lang="en-US" dirty="0"/>
+              <a:t>Four: a fix could backfire. If we train the model to look honest, it might just stop mentioning the hint while still following it. OpenAI saw exactly this in 2025. So we'll judge the fix by what the model does: its answer with the hint should match its answer without it.</a:t>
             </a:r>
           </a:p>
         </p:txBody>
@@ -1300,27 +1495,93 @@
           <a:lstStyle/>
           <a:p>
             <a:r>
+              <a:rPr lang="en-US" dirty="0">
+                <a:effectLst/>
+              </a:rPr>
+              <a:t>So, where are we going next?</a:t>
+            </a:r>
+            <a:br>
               <a:rPr lang="en-US" dirty="0"/>
-              <a:t>
-TOP ROW, our plan in one line.
-• The failure: a wrong hint, most of all from a tool, changes the answer, and the final answer hides it.
-• Suspected cause in the architecture: inside a transformer, attention lets every new word draw on every earlier word in the same way. Nothing marks a tool’s text as less trustworthy than the model’s own reasoning; the role labels are just more words. And the reasoning is written one word at a time on top of itself, so once it repeats the hint (“the expected answer is G”), every later word can build on that repetition. This is a hypothesis we will test, not a finding yet.
-• Proposed fix: fine-tune Olmo 3 7B Think with two changes. First, source tags: a small learned vector added to every word that tells the model where the word came from: the user, a tool, or itself. Second, training examples in which the model checks the hint, says it saw it, and keeps the answer it would give without the hint. We train only small LoRA adapters, not the whole model.
-• What we will show: fewer answers that follow the hint and more honest final answers, with the same accuracy, on new questions.
-THREE TRACKS.
-• A, Explain and fix, led by Ritik: look inside Olmo to test the suspected cause (how strongly the answer attends to the hint’s words, and where in the reasoning the hinted answer takes over), then train the fix.
-• B, Test widely, led by Arsha: more open thinking models, such as Qwen3 in Ollama with thinking switched on and off, and closed models from OpenAI, Anthropic and xAI. Claude can also switch thinking on and off. Closed models hide or summarize their reasoning, so for them we score the answer and the final text. Real tool calls replace the pasted text. API budget: about 15 dollars, 5 each for OpenAI, Anthropic and xAI, using their smaller reasoning models.
-• C, Multi-agent pipeline, led by Shrey: a solver agent answers with a lookup tool that sometimes returns a wrong answer; a reviewer agent checks the answer, and we vary what it can see; a </a:t>
-            </a:r>
-            <a:r>
-              <a:rPr lang="en-US" dirty="0" err="1"/>
-              <a:t>rechecker</a:t>
-            </a:r>
-            <a:r>
+            </a:br>
+            <a:r>
+              <a:rPr lang="en-US" dirty="0">
+                <a:effectLst/>
+              </a:rPr>
+              <a:t>Our failure was a wrong hint, especially comes from a tool that changes the model answer and the final answer hides it. We suspected the cause is in the architecture; attention treats all text alike.</a:t>
+            </a:r>
+            <a:endParaRPr lang="en-US" dirty="0"/>
+          </a:p>
+          <a:p>
+            <a:r>
+              <a:rPr lang="en-US" dirty="0">
+                <a:effectLst/>
+              </a:rPr>
+              <a:t>So, our proposed fix is to fine-tune Olmo with </a:t>
+            </a:r>
+            <a:r>
+              <a:rPr lang="en-US" dirty="0" err="1">
+                <a:effectLst/>
+              </a:rPr>
+              <a:t>LoRA</a:t>
+            </a:r>
+            <a:r>
+              <a:rPr lang="en-US" dirty="0">
+                <a:effectLst/>
+              </a:rPr>
+              <a:t> adapters and put a source tag with every word so the model knows whether text came from user, tool or model.</a:t>
+            </a:r>
+            <a:endParaRPr lang="en-US" dirty="0"/>
+          </a:p>
+          <a:p>
+            <a:r>
+              <a:rPr lang="en-US" dirty="0">
+                <a:effectLst/>
+              </a:rPr>
+              <a:t>That splits into three tracks:</a:t>
+            </a:r>
+            <a:endParaRPr lang="en-US" dirty="0"/>
+          </a:p>
+          <a:p>
+            <a:r>
+              <a:rPr lang="en-US" dirty="0">
+                <a:effectLst/>
+              </a:rPr>
+              <a:t>Track A: Look inside the model and train the fix</a:t>
+            </a:r>
+            <a:br>
               <a:rPr lang="en-US" dirty="0"/>
-              <a:t> agent asks the solver again without the tool result and flags answers that change. We measure how often a wrong answer reaches the team’s final output, how often each agent catches it, and false alarms.
-</a:t>
-            </a:r>
+            </a:br>
+            <a:r>
+              <a:rPr lang="en-US" dirty="0">
+                <a:effectLst/>
+              </a:rPr>
+              <a:t>Track B: Test more open and closed models , with much larger dataset</a:t>
+            </a:r>
+            <a:br>
+              <a:rPr lang="en-US" dirty="0">
+                <a:effectLst/>
+              </a:rPr>
+            </a:br>
+            <a:r>
+              <a:rPr lang="en-US" dirty="0">
+                <a:effectLst/>
+              </a:rPr>
+              <a:t>Track C: Test multi-agents to see whether the answer slips through</a:t>
+            </a:r>
+            <a:endParaRPr lang="en-US" dirty="0"/>
+          </a:p>
+          <a:p>
+            <a:r>
+              <a:rPr lang="en-US" dirty="0">
+                <a:effectLst/>
+              </a:rPr>
+              <a:t>Over to Ritik for Demo</a:t>
+            </a:r>
+            <a:endParaRPr lang="en-US" dirty="0"/>
+          </a:p>
+          <a:p>
+            <a:pPr rtl="0"/>
+            <a:endParaRPr lang="en-US" dirty="0"/>
           </a:p>
         </p:txBody>
       </p:sp>
@@ -1404,7 +1665,10 @@
           <a:bodyPr/>
           <a:lstStyle/>
           <a:p>
-            <a:endParaRPr lang="en-US" dirty="0"/>
+            <a:r>
+              <a:rPr lang="en-US" dirty="0"/>
+              <a:t>That's our progress. Thank you, and we're happy to take questions."</a:t>
+            </a:r>
           </a:p>
         </p:txBody>
       </p:sp>
@@ -4479,7 +4743,7 @@
           <p:nvPr>
             <p:extLst>
               <p:ext uri="{D42A27DB-BD31-4B8C-83A1-F6EECF244321}">
-                <p14:modId xmlns:p14="http://schemas.microsoft.com/office/powerpoint/2010/main" val="1829163100"/>
+                <p14:modId xmlns:p14="http://schemas.microsoft.com/office/powerpoint/2010/main" val="1282266001"/>
               </p:ext>
             </p:extLst>
           </p:nvPr>
@@ -5497,7 +5761,7 @@
                           <a:ea typeface="Calibri" pitchFamily="34" charset="-122"/>
                           <a:cs typeface="Calibri" pitchFamily="34" charset="-120"/>
                         </a:rPr>
-                        <a:t>Keywords to sort; two of us label each reply</a:t>
+                        <a:t>Keywords to sort; we label each reply</a:t>
                       </a:r>
                       <a:endParaRPr lang="en-US" sz="1100" dirty="0">
                         <a:latin typeface="Calibri" charset="0"/>
@@ -8268,7 +8532,7 @@
                 <a:ea typeface="Calibri" pitchFamily="34" charset="-122"/>
                 <a:cs typeface="Calibri" pitchFamily="34" charset="-120"/>
               </a:rPr>
-              <a:t>16 of </a:t>
+              <a:t>17 of </a:t>
             </a:r>
             <a:r>
               <a:rPr lang="en-US" sz="1150" dirty="0">
@@ -9486,7 +9750,7 @@
                 <a:ea typeface="Calibri" pitchFamily="34" charset="-122"/>
                 <a:cs typeface="Calibri" pitchFamily="34" charset="-120"/>
               </a:rPr>
-              <a:t>Two of us label each reply by hand (101 ready) and report how often we agree.</a:t>
+              <a:t>We label each reply by hand (101 ready) and report how often we agree.</a:t>
             </a:r>
             <a:endParaRPr lang="en-US" sz="1100" dirty="0"/>
           </a:p>

--- a/presentation/CSE598_Group10_progress_Presentation_v3.pptx
+++ b/presentation/CSE598_Group10_progress_Presentation_v3.pptx
@@ -844,37 +844,16 @@
           <a:p>
             <a:r>
               <a:rPr lang="en-US" dirty="0"/>
-              <a:t>Our project starts from a simple idea: we slip a wrong hint into a question and watch what the model does. </a:t>
-            </a:r>
-          </a:p>
-          <a:p>
-            <a:r>
-              <a:rPr lang="en-US" dirty="0"/>
-              <a:t>We check two things. </a:t>
-            </a:r>
-          </a:p>
-          <a:p>
-            <a:r>
-              <a:rPr lang="en-US" dirty="0"/>
-              <a:t>First, does the hint change the model's answer? </a:t>
-            </a:r>
-          </a:p>
-          <a:p>
-            <a:r>
-              <a:rPr lang="en-US" dirty="0"/>
-              <a:t>Second, if it does, does the model admit it? </a:t>
-            </a:r>
+              <a:t>We are presenting : Do thinking modes make chain of thought more honest?</a:t>
+            </a:r>
+          </a:p>
+          <a:p>
+            <a:endParaRPr lang="en-US" dirty="0"/>
           </a:p>
           <a:p>
             <a:r>
               <a:rPr lang="en-US" dirty="0"/>
               <a:t>Thinking models make this interesting, because they give us two texts: private reasoning that users don't normally see, and a final answer that they do. </a:t>
-            </a:r>
-          </a:p>
-          <a:p>
-            <a:r>
-              <a:rPr lang="en-US" dirty="0"/>
-              <a:t>So the real question is: which of the two tells you the hint was used?</a:t>
             </a:r>
           </a:p>
         </p:txBody>
@@ -959,6 +938,33 @@
           <a:bodyPr/>
           <a:lstStyle/>
           <a:p>
+            <a:pPr marL="0" marR="0" lvl="0" indent="0" algn="l" defTabSz="914400" rtl="0" eaLnBrk="1" fontAlgn="auto" latinLnBrk="0" hangingPunct="1">
+              <a:lnSpc>
+                <a:spcPct val="100000"/>
+              </a:lnSpc>
+              <a:spcBef>
+                <a:spcPts val="0"/>
+              </a:spcBef>
+              <a:spcAft>
+                <a:spcPts val="0"/>
+              </a:spcAft>
+              <a:buClrTx/>
+              <a:buSzTx/>
+              <a:buFontTx/>
+              <a:buNone/>
+              <a:tabLst/>
+              <a:defRPr/>
+            </a:pPr>
+            <a:r>
+              <a:rPr lang="en-US" dirty="0"/>
+              <a:t>Our project starts from a simple idea: we slip a wrong hint into a question and watch what the model does. </a:t>
+            </a:r>
+          </a:p>
+          <a:p>
+            <a:pPr rtl="0"/>
+            <a:endParaRPr lang="en-US" dirty="0"/>
+          </a:p>
+          <a:p>
             <a:pPr rtl="0"/>
             <a:r>
               <a:rPr lang="en-US" dirty="0"/>
@@ -966,6 +972,24 @@
             </a:r>
           </a:p>
           <a:p>
+            <a:r>
+              <a:rPr lang="en-US" dirty="0"/>
+              <a:t>We check two things. </a:t>
+            </a:r>
+          </a:p>
+          <a:p>
+            <a:r>
+              <a:rPr lang="en-US" dirty="0"/>
+              <a:t>First, does the hint change the model's answer? </a:t>
+            </a:r>
+          </a:p>
+          <a:p>
+            <a:r>
+              <a:rPr lang="en-US" dirty="0"/>
+              <a:t>Second, if it does, does the model admit it? </a:t>
+            </a:r>
+          </a:p>
+          <a:p>
             <a:pPr rtl="0"/>
             <a:r>
               <a:rPr lang="en-US" dirty="0"/>
@@ -983,7 +1007,7 @@
             <a:pPr rtl="0"/>
             <a:r>
               <a:rPr lang="en-US" dirty="0"/>
-              <a:t>Either the user says 'I think the answer is C', or the same letter comes as a tool hint, Like a Answer key lookup tool giving output in a structured format as expected C. </a:t>
+              <a:t>Either the user says 'I think the answer is C', or the same letter comes as a tool hint, Like a Answer key lookup tool giving output as expected C. </a:t>
             </a:r>
           </a:p>
           <a:p>
@@ -998,29 +1022,14 @@
             </a:r>
             <a:r>
               <a:rPr lang="en-US" dirty="0"/>
-              <a:t> always say what they think: Unfaithful </a:t>
-            </a:r>
-            <a:r>
-              <a:rPr lang="en-US" dirty="0" err="1"/>
-              <a:t>explainations</a:t>
-            </a:r>
+              <a:t> always say what they think. They showed that a suggested answer changed GPT-3.5's and Claude 1.0's answers, and the explanations never mentioned it. We extend that to open thinking models, where we can read the private reasoning and the final answer separately. </a:t>
+            </a:r>
+          </a:p>
+          <a:p>
+            <a:pPr rtl="0"/>
             <a:r>
               <a:rPr lang="en-US" dirty="0"/>
-              <a:t> in chain of thought prompting.</a:t>
-            </a:r>
-          </a:p>
-          <a:p>
-            <a:pPr rtl="0"/>
-            <a:r>
-              <a:rPr lang="en-US" dirty="0"/>
-              <a:t>They showed that a suggested answer changed GPT-3.5's and Claude 1.0's answers, and the explanations never mentioned it. We extend that to open thinking models, where we can read the private reasoning and the final answer separately. We add tool hints, Multi agent tool and reviewer checks, we study what is causing this, and fine tune it to improve in such scenarios.</a:t>
-            </a:r>
-          </a:p>
-          <a:p>
-            <a:pPr rtl="0"/>
-            <a:r>
-              <a:rPr lang="en-US" dirty="0"/>
-              <a:t>After the feedback on our proposal,  we made four changes. We went from eight models to six, dropping the Qwen3 235B pair because it was too slow. We switched to puzzles we generate ourselves plus harder MMLU-Pro questions. We ask each question several times without a hint to measure chance. And we now label replies by hand instead of relying on an LLM judge.</a:t>
+              <a:t>After the feedback on our proposal,  we made some changes. We went from eight models to six, dropping the Qwen3 235B pair because it was too slow. We switched to puzzles we generate ourselves plus harder MMLU-Pro questions. And we now label replies by hand instead of relying on an LLM judge.</a:t>
             </a:r>
           </a:p>
         </p:txBody>
@@ -1129,14 +1138,14 @@
             <a:pPr rtl="0"/>
             <a:r>
               <a:rPr lang="en-US" dirty="0"/>
-              <a:t>Here's a real example. An engineering question whose right answer is E. </a:t>
+              <a:t>Here's a real example. A MMLU - PRO  engineering question whose right answer is E. </a:t>
             </a:r>
           </a:p>
           <a:p>
             <a:pPr rtl="0"/>
             <a:r>
               <a:rPr lang="en-US" dirty="0"/>
-              <a:t>The tool hint says G, and Qwen answers G. Its private reasoning cites the tool; its final answer doesn't. </a:t>
+              <a:t>The tool hint says G, so Qwen answers G. Its private reasoning cites the tool; its final answer doesn't. </a:t>
             </a:r>
           </a:p>
           <a:p>
@@ -1231,36 +1240,33 @@
             <a:pPr rtl="0"/>
             <a:r>
               <a:rPr lang="en-US" dirty="0"/>
-              <a:t>Preliminary results</a:t>
+              <a:t>These are our early results.</a:t>
             </a:r>
           </a:p>
           <a:p>
             <a:pPr rtl="0"/>
             <a:r>
               <a:rPr lang="en-US" dirty="0"/>
-              <a:t>These are our early results.</a:t>
+              <a:t>For test 1 on left side, it used 24 easy puzzles we made ourselves, with a wrong hint from the user. Each model got the wrong hint 48 times. Only the smallest regular model fell for it, 5 times. The bigger models solved almost every puzzle, so the hint had nothing to push. </a:t>
             </a:r>
           </a:p>
           <a:p>
             <a:pPr rtl="0"/>
             <a:r>
               <a:rPr lang="en-US" dirty="0"/>
-              <a:t>[Point to the left chart.] Our first test used 24 easy puzzles we made ourselves, with a wrong hint from the user. Each model got the wrong hint 48 times. Only the smallest regular model fell for it, 5 times. The bigger models solved almost every puzzle, so the hint had nothing to push. And without a hint, no model ever picked those wrong letters, so those 5 really came from the hint.</a:t>
+              <a:t>The second test used 30 harder exam questions. We gave the same wrong letter two ways. Gray is the user saying "I think it's G." Pink is text that looks like an answer-key tool saying "expected: G." The regular model falls for both. But the thinking models mostly ignore the user and follow the tool. Together, they took the tool's wrong answer on 17 out of 31 questions, and the user's on just 2.</a:t>
             </a:r>
           </a:p>
           <a:p>
             <a:pPr rtl="0"/>
             <a:r>
               <a:rPr lang="en-US" dirty="0"/>
-              <a:t>[Point to the right chart.] The second test used 30 harder exam questions. We gave the same wrong letter two ways. Gray is the user saying "I think it's G." Pink is text that looks like an answer-key tool saying "expected: G." The regular model falls for both. But the thinking models mostly ignore the user and follow the tool. Together, they took the tool's wrong answer on 17 out of 31 questions, and the user's on just 2.</a:t>
+              <a:t>So, three things. Hints work when the model is unsure. Thinking models trust tools. And they keep it to themselves: in 216 puzzle runs with a hint, the private reasoning mentioned it 208 times, but the final answer only 8.</a:t>
             </a:r>
           </a:p>
           <a:p>
             <a:pPr rtl="0"/>
-            <a:r>
-              <a:rPr lang="en-US" dirty="0"/>
-              <a:t>[Point to the bottom left.] So, three things. Hints work when the model is unsure. Thinking models trust tools. And they keep it to themselves: in 216 puzzle runs with a hint, the private reasoning mentioned it 208 times, but the final answer only 8.</a:t>
-            </a:r>
+            <a:endParaRPr lang="en-US" dirty="0"/>
           </a:p>
           <a:p>
             <a:pPr rtl="0"/>
@@ -1354,62 +1360,35 @@
             <a:pPr rtl="0"/>
             <a:r>
               <a:rPr lang="en-US" dirty="0"/>
-              <a:t>Risks and obstacles</a:t>
+              <a:t>We saw some risks with a plan for each:</a:t>
+            </a:r>
+            <a:br>
+              <a:rPr lang="en-US" dirty="0"/>
+            </a:br>
+            <a:r>
+              <a:rPr lang="en-US" dirty="0"/>
+              <a:t>First problem being using too few models. The second test had only two thinking models, one try per question, and the tool was text we pasted in. Next, we'll test more models, including OpenAI, Claude and Grok, with real tool calls and more tries per question.</a:t>
             </a:r>
           </a:p>
           <a:p>
             <a:pPr rtl="0"/>
-            <a:endParaRPr lang="en-US" dirty="0"/>
+            <a:r>
+              <a:rPr lang="en-US" dirty="0"/>
+              <a:t>Second: our keyword counting is rough. We search replies for words like "the user," but thinking models say that even with no hint. And a keyword can't tell "the user says E, but it's D" from "the user says E, so E." So, we will read the replies by hand.</a:t>
+            </a:r>
+            <a:br>
+              <a:rPr lang="en-US" dirty="0"/>
+            </a:br>
+            <a:r>
+              <a:rPr lang="en-US" dirty="0"/>
+              <a:t>Moreover, there are some long replies which gets cut off and spill into final answer which we do not want and that happened 8 times out of 8. So, we always stream and count a cut-off reply as no answer.</a:t>
+            </a:r>
           </a:p>
           <a:p>
             <a:pPr rtl="0"/>
             <a:r>
               <a:rPr lang="en-US" dirty="0"/>
-              <a:t>We see four risks, and we have a plan for each.</a:t>
-            </a:r>
-          </a:p>
-          <a:p>
-            <a:pPr rtl="0"/>
-            <a:endParaRPr lang="en-US" dirty="0"/>
-          </a:p>
-          <a:p>
-            <a:pPr rtl="0"/>
-            <a:r>
-              <a:rPr lang="en-US" dirty="0"/>
-              <a:t>One: too few models. The second test had only two thinking models, one try per question, and the tool was text we pasted in. Next, we'll test more models, including OpenAI, Claude and Grok, with real tool calls and three tries per question.</a:t>
-            </a:r>
-          </a:p>
-          <a:p>
-            <a:pPr rtl="0"/>
-            <a:endParaRPr lang="en-US" dirty="0"/>
-          </a:p>
-          <a:p>
-            <a:pPr rtl="0"/>
-            <a:r>
-              <a:rPr lang="en-US" dirty="0"/>
-              <a:t>Two: our counting is rough. We search replies for words like "the user," but thinking models say that even with no hint. And a keyword can't tell "the user says E, but it's D" from "the user says E, so E." So two of us will read the replies by hand.</a:t>
-            </a:r>
-          </a:p>
-          <a:p>
-            <a:pPr rtl="0"/>
-            <a:endParaRPr lang="en-US" dirty="0"/>
-          </a:p>
-          <a:p>
-            <a:pPr rtl="0"/>
-            <a:r>
-              <a:rPr lang="en-US" dirty="0"/>
-              <a:t>Three: long replies can get cut off. When that happens and the reply isn't streamed, the model's private notes show up in the visible answer, 8 times out of 8. So we always stream, and count a cut-off reply as no answer.</a:t>
-            </a:r>
-          </a:p>
-          <a:p>
-            <a:pPr rtl="0"/>
-            <a:endParaRPr lang="en-US" dirty="0"/>
-          </a:p>
-          <a:p>
-            <a:pPr rtl="0"/>
-            <a:r>
-              <a:rPr lang="en-US" dirty="0"/>
-              <a:t>Four: a fix could backfire. If we train the model to look honest, it might just stop mentioning the hint while still following it. OpenAI saw exactly this in 2025. So we'll judge the fix by what the model does: its answer with the hint should match its answer without it.</a:t>
+              <a:t>Lastly: If we train the model to look honest, it might just stop mentioning the hint while still following it. OpenAI saw exactly this in 2025. So, we'll judge the fix by what the model does: its answer with the hint should match its answer without it.</a:t>
             </a:r>
           </a:p>
         </p:txBody>
@@ -1934,7 +1913,7 @@
           </a:prstGeom>
           <a:extLst>
             <a:ext uri="{C572A759-6A51-4108-AA02-DFA0A04FC94B}">
-              <ma14:wrappingTextBoxFlag xmlns="" xmlns:ma14="http://schemas.microsoft.com/office/mac/drawingml/2011/main" val="0"/>
+              <ma14:wrappingTextBoxFlag xmlns:ma14="http://schemas.microsoft.com/office/mac/drawingml/2011/main" xmlns="" val="0"/>
             </a:ext>
           </a:extLst>
         </p:spPr>
@@ -2009,7 +1988,7 @@
           </a:prstGeom>
           <a:extLst>
             <a:ext uri="{C572A759-6A51-4108-AA02-DFA0A04FC94B}">
-              <ma14:wrappingTextBoxFlag xmlns="" xmlns:ma14="http://schemas.microsoft.com/office/mac/drawingml/2011/main" val="0"/>
+              <ma14:wrappingTextBoxFlag xmlns:ma14="http://schemas.microsoft.com/office/mac/drawingml/2011/main" xmlns="" val="0"/>
             </a:ext>
           </a:extLst>
         </p:spPr>
@@ -5839,7 +5818,7 @@
           </a:prstGeom>
           <a:extLst>
             <a:ext uri="{C572A759-6A51-4108-AA02-DFA0A04FC94B}">
-              <ma14:wrappingTextBoxFlag xmlns="" xmlns:ma14="http://schemas.microsoft.com/office/mac/drawingml/2011/main" val="0"/>
+              <ma14:wrappingTextBoxFlag xmlns:ma14="http://schemas.microsoft.com/office/mac/drawingml/2011/main" xmlns="" val="0"/>
             </a:ext>
           </a:extLst>
         </p:spPr>
@@ -7880,7 +7859,7 @@
           </a:prstGeom>
           <a:extLst>
             <a:ext uri="{C572A759-6A51-4108-AA02-DFA0A04FC94B}">
-              <ma14:wrappingTextBoxFlag xmlns="" xmlns:ma14="http://schemas.microsoft.com/office/mac/drawingml/2011/main" val="0"/>
+              <ma14:wrappingTextBoxFlag xmlns:ma14="http://schemas.microsoft.com/office/mac/drawingml/2011/main" xmlns="" val="0"/>
             </a:ext>
           </a:extLst>
         </p:spPr>
@@ -9135,7 +9114,7 @@
           </a:prstGeom>
           <a:extLst>
             <a:ext uri="{C572A759-6A51-4108-AA02-DFA0A04FC94B}">
-              <ma14:wrappingTextBoxFlag xmlns="" xmlns:ma14="http://schemas.microsoft.com/office/mac/drawingml/2011/main" val="0"/>
+              <ma14:wrappingTextBoxFlag xmlns:ma14="http://schemas.microsoft.com/office/mac/drawingml/2011/main" xmlns="" val="0"/>
             </a:ext>
           </a:extLst>
         </p:spPr>
@@ -10266,7 +10245,7 @@
           </a:prstGeom>
           <a:extLst>
             <a:ext uri="{C572A759-6A51-4108-AA02-DFA0A04FC94B}">
-              <ma14:wrappingTextBoxFlag xmlns="" xmlns:ma14="http://schemas.microsoft.com/office/mac/drawingml/2011/main" val="0"/>
+              <ma14:wrappingTextBoxFlag xmlns:ma14="http://schemas.microsoft.com/office/mac/drawingml/2011/main" xmlns="" val="0"/>
             </a:ext>
           </a:extLst>
         </p:spPr>
@@ -11924,7 +11903,7 @@
           </a:prstGeom>
           <a:extLst>
             <a:ext uri="{C572A759-6A51-4108-AA02-DFA0A04FC94B}">
-              <ma14:wrappingTextBoxFlag xmlns="" xmlns:ma14="http://schemas.microsoft.com/office/mac/drawingml/2011/main" val="0"/>
+              <ma14:wrappingTextBoxFlag xmlns:ma14="http://schemas.microsoft.com/office/mac/drawingml/2011/main" xmlns="" val="0"/>
             </a:ext>
           </a:extLst>
         </p:spPr>
